--- a/docs/slides/slides - retreat-slot6 .pptx
+++ b/docs/slides/slides - retreat-slot6 .pptx
@@ -732,19 +732,15 @@
           </a:bodyPr>
           <a:lstStyle/>
           <a:p>
-            <a:pPr indent="0" lvl="0" marL="0" rtl="0" algn="l">
-              <a:spcBef>
-                <a:spcPts val="0"/>
-              </a:spcBef>
-              <a:spcAft>
-                <a:spcPts val="0"/>
-              </a:spcAft>
-              <a:buNone/>
-            </a:pPr>
             <a:r>
-              <a:t/>
+              <a:t>Agricultural research data lives across dozens of repositories with different schemas, formats, and conventions. ARCs (Annotated Research Contexts) are the emerging standard for packaging that data, and FAIRagro's Search Hub is where researchers discover it. FAIRweaver's conversion pipeline bridges the gap: take metadata from any source, map it into an ARC, then extract the FAIRagro-specific schema for Search Hub ingestion.</a:t>
             </a:r>
-            <a:endParaRPr/>
+          </a:p>
+          <a:p/>
+          <a:p>
+            <a:r>
+              <a:t>The challenge is structural. Every ARC is a JSON-LD graph, and different research groups model the same domain concepts at different depths and in different graph locations. The pipeline must handle that variability — or define conventions to eliminate it.</a:t>
+            </a:r>
           </a:p>
         </p:txBody>
       </p:sp>
@@ -831,19 +827,48 @@
           </a:bodyPr>
           <a:lstStyle/>
           <a:p>
-            <a:pPr indent="0" lvl="0" marL="0" rtl="0" algn="l">
-              <a:spcBef>
-                <a:spcPts val="0"/>
-              </a:spcBef>
-              <a:spcAft>
-                <a:spcPts val="0"/>
-              </a:spcAft>
-              <a:buNone/>
-            </a:pPr>
             <a:r>
-              <a:t/>
+              <a:t>The pipeline is strictly sequential. Schema.org JSON-LD from an RDI (Research Data Infrastructure) enters at the top, gets transformed by FAIRagro templates, and produces two outputs in order:</a:t>
             </a:r>
-            <a:endParaRPr/>
+          </a:p>
+          <a:p/>
+          <a:p>
+            <a:r>
+              <a:t>1. Output A — ARC RO-Crate. A JSON-LD document that follows the ARC specification.</a:t>
+            </a:r>
+          </a:p>
+          <a:p>
+            <a:r>
+              <a:t>2. Output B — FAIRagro JSON. Derived from Output A, not produced independently.</a:t>
+            </a:r>
+          </a:p>
+          <a:p/>
+          <a:p>
+            <a:r>
+              <a:t>Output B's dependency on Output A is the key architectural insight. If the ARC is incomplete, the FAIRagro extraction is incomplete too. There is no shortcut.</a:t>
+            </a:r>
+          </a:p>
+          <a:p/>
+          <a:p>
+            <a:r>
+              <a:t>Two paths feed the ARC into Search Hub:</a:t>
+            </a:r>
+          </a:p>
+          <a:p>
+            <a:r>
+              <a:t>- Path 1 (direct harvest): GitLab DataHub stores the ARC; a harvester reads it and produces FAIRagro JSON.</a:t>
+            </a:r>
+          </a:p>
+          <a:p>
+            <a:r>
+              <a:t>- Path 2 (orchestrated): The FAIRagro Middleware API coordinates the full workflow, from harvest through conversion to ingestion.</a:t>
+            </a:r>
+          </a:p>
+          <a:p/>
+          <a:p>
+            <a:r>
+              <a:t>Both paths converge on the same FAIRagro schema.json consumed by Search Hub.</a:t>
+            </a:r>
           </a:p>
         </p:txBody>
       </p:sp>
@@ -930,19 +955,33 @@
           </a:bodyPr>
           <a:lstStyle/>
           <a:p>
-            <a:pPr indent="0" lvl="0" marL="0" rtl="0" algn="l">
-              <a:spcBef>
-                <a:spcPts val="0"/>
-              </a:spcBef>
-              <a:spcAft>
-                <a:spcPts val="0"/>
-              </a:spcAft>
-              <a:buNone/>
-            </a:pPr>
             <a:r>
-              <a:t/>
+              <a:t>Three test files illustrate the relationship between ARC quality and extraction depth:</a:t>
             </a:r>
-            <a:endParaRPr/>
+          </a:p>
+          <a:p/>
+          <a:p>
+            <a:r>
+              <a:t>Synthetic (schema-org-wheat-full.json): A manually crafted input designed to cover every FAIRagro-required field. The resulting ARC is fully compliant; extraction gets everything. This proves the pipeline works when the input follows the rules.</a:t>
+            </a:r>
+          </a:p>
+          <a:p/>
+          <a:p>
+            <a:r>
+              <a:t>Real — Small (arc-ro-crate-dronflyover.json, &lt;10 MB): An actual agronomic ARC from the UC13 drone flyover. It follows the ISA Investigation → Study → Assay hierarchy but uses non-standard property names and missing optional fields. Result: partial extraction. Only fields that map unambiguously to the FAIRagro schema come through.</a:t>
+            </a:r>
+          </a:p>
+          <a:p/>
+          <a:p>
+            <a:r>
+              <a:t>Real — Large (arc-ro-crate-muenchenberg-lte.json, &gt;100 MB): A long-term experiment ARC from Müncheberg with 27+ assays but a flatter structure. Many domain-specific fields don't match any FAIRagro template key. Result: basic harvest only — title, description, identifier, creator.</a:t>
+            </a:r>
+          </a:p>
+          <a:p/>
+          <a:p>
+            <a:r>
+              <a:t>The pattern is clear: compliance determines extraction depth. If an ARC follows the FAIRagro specification, you get full extraction. If not, you get the intersection of what's present and what's mappable. This is not a pipeline limitation — it's a signal that the community needs modeling conventions.</a:t>
+            </a:r>
           </a:p>
         </p:txBody>
       </p:sp>
@@ -1029,19 +1068,37 @@
           </a:bodyPr>
           <a:lstStyle/>
           <a:p>
-            <a:pPr indent="0" lvl="0" marL="0" rtl="0" algn="l">
-              <a:spcBef>
-                <a:spcPts val="0"/>
-              </a:spcBef>
-              <a:spcAft>
-                <a:spcPts val="0"/>
-              </a:spcAft>
-              <a:buNone/>
-            </a:pPr>
             <a:r>
-              <a:t/>
+              <a:t>Two real ARCs, one problem: same domain concepts at different graph depths.</a:t>
             </a:r>
-            <a:endParaRPr/>
+          </a:p>
+          <a:p/>
+          <a:p>
+            <a:r>
+              <a:t>Drone Flyover (UC13):</a:t>
+            </a:r>
+          </a:p>
+          <a:p>
+            <a:r>
+              <a:t>Following the ISA hierarchy: Investigation → Study → Assay. Two Agrischemas concepts live at very different traversal depths:</a:t>
+            </a:r>
+          </a:p>
+          <a:p/>
+          <a:p>
+            <a:r>
+              <a:t>- sensorType is 1 hop from Assay via measurementMethod → DefinedTerm.</a:t>
+            </a:r>
+          </a:p>
+          <a:p>
+            <a:r>
+              <a:t>- cropSpecies is 4 hops from Study via about → LabProcess → object → Sample → additionalProperty → PropertyValue.</a:t>
+            </a:r>
+          </a:p>
+          <a:p/>
+          <a:p>
+            <a:r>
+              <a:t>The sensorType path is short and direct. The cropSpecies path requires traversing five nodes with specific predicates at each step. The parser must know the exact path — any deviation and it loses the concept.</a:t>
+            </a:r>
           </a:p>
         </p:txBody>
       </p:sp>
@@ -1128,19 +1185,36 @@
           </a:bodyPr>
           <a:lstStyle/>
           <a:p>
-            <a:pPr indent="0" lvl="0" marL="0" rtl="0" algn="l">
-              <a:spcBef>
-                <a:spcPts val="0"/>
-              </a:spcBef>
-              <a:spcAft>
-                <a:spcPts val="0"/>
-              </a:spcAft>
-              <a:buNone/>
-            </a:pPr>
             <a:r>
-              <a:t/>
+              <a:t>Müncheberg LTE:</a:t>
             </a:r>
-            <a:endParaRPr/>
+          </a:p>
+          <a:p>
+            <a:r>
+              <a:t>A structurally different ARC. Investigation connects directly to 27+ Assays; a Study entity exists (studies/LTE-V140-Muencheberg/) but is NOT linked via the Investigation's hasPart chain. Crop species surfaces via a shorter alternative path: Source → additionalProperty → CharacteristicValue (2 hops instead of 4). Müncheberg also has the same long LabProcess chain as the drone flyover (via Study.about → LabProcess → object → Source → additionalProperty), so both paths coexist. Sensor metadata is absent because this ARC is about crop phenology, not remote sensing.</a:t>
+            </a:r>
+          </a:p>
+          <a:p/>
+          <a:p>
+            <a:r>
+              <a:t>Comparison table:</a:t>
+            </a:r>
+          </a:p>
+          <a:p>
+            <a:r>
+              <a:t>- Drone Flyover: Study in hasPart chain, 4-hop crop path, 1 assay, has sensor</a:t>
+            </a:r>
+          </a:p>
+          <a:p>
+            <a:r>
+              <a:t>- Müncheberg LTE: Study disconnected, 2-hop + 4-hop crop paths, 27+ assays, no sensor</a:t>
+            </a:r>
+          </a:p>
+          <a:p/>
+          <a:p>
+            <a:r>
+              <a:t>A generic parser cannot reliably extract crop species from both ARCs without knowing which structural pattern to apply. This variability is the core motivation for standardization.</a:t>
+            </a:r>
           </a:p>
         </p:txBody>
       </p:sp>
@@ -1227,19 +1301,50 @@
           </a:bodyPr>
           <a:lstStyle/>
           <a:p>
-            <a:pPr indent="0" lvl="0" marL="0" rtl="0" algn="l">
-              <a:spcBef>
-                <a:spcPts val="0"/>
-              </a:spcBef>
-              <a:spcAft>
-                <a:spcPts val="0"/>
-              </a:spcAft>
-              <a:buNone/>
-            </a:pPr>
             <a:r>
-              <a:t/>
+              <a:t>After examining both ARCs, a required traversal path emerges for unambiguous crop extraction:</a:t>
             </a:r>
-            <a:endParaRPr/>
+          </a:p>
+          <a:p/>
+          <a:p>
+            <a:r>
+              <a:t>Study → about → LabProcess → object → Sample/additionalType:Material</a:t>
+            </a:r>
+          </a:p>
+          <a:p>
+            <a:r>
+              <a:t>  → additionalProperty → PropertyValue/propertyID</a:t>
+            </a:r>
+          </a:p>
+          <a:p/>
+          <a:p>
+            <a:r>
+              <a:t>The terminal node — PropertyValue with a propertyID — is critical. name: Organism and value: Solanum tuberosum are human-readable but machine-ambiguous. The propertyID linking to an ontology term (e.g., agrovoc:c_49904) makes it semantically precise and machine-resolvable.</a:t>
+            </a:r>
+          </a:p>
+          <a:p/>
+          <a:p>
+            <a:r>
+              <a:t>Two open questions remain:</a:t>
+            </a:r>
+          </a:p>
+          <a:p/>
+          <a:p>
+            <a:r>
+              <a:t>1. Structure specification. How do we formally specify a required graph traversal path so that tools can validate compliance automatically? A shape expression (ShEx) or SHACL shape? A simple property-path DSL in the pivot registry YAML?</a:t>
+            </a:r>
+          </a:p>
+          <a:p/>
+          <a:p>
+            <a:r>
+              <a:t>2. Ontology mapping standardization. propertyID values need a shared vocabulary of mappings so that every ARC uses the same ontology term for 'crop species.' SSSOM (Simple Standard for Sharing Ontological Mappings) is a candidate — but it needs community adoption.</a:t>
+            </a:r>
+          </a:p>
+          <a:p/>
+          <a:p>
+            <a:r>
+              <a:t>These are not FAIRweaver problems. They are community-level standardization problems that FAIRweaver exposes and quantifies.</a:t>
+            </a:r>
           </a:p>
         </p:txBody>
       </p:sp>
